--- a/labs/lab08/slides/slides.pptx
+++ b/labs/lab08/slides/slides.pptx
@@ -5,7 +5,7 @@
     <p:sldMasterId id="2147483696" r:id="rId1"/>
   </p:sldMasterIdLst>
   <p:notesMasterIdLst>
-    <p:notesMasterId r:id="rId16"/>
+    <p:notesMasterId r:id="rId15"/>
   </p:notesMasterIdLst>
   <p:sldIdLst>
     <p:sldId id="256" r:id="rId2"/>
@@ -21,7 +21,6 @@
     <p:sldId id="266" r:id="rId12"/>
     <p:sldId id="267" r:id="rId13"/>
     <p:sldId id="268" r:id="rId14"/>
-    <p:sldId id="269" r:id="rId15"/>
   </p:sldIdLst>
   <p:sldSz cx="12192000" cy="6858000"/>
   <p:notesSz cx="6858000" cy="9144000"/>
@@ -525,10 +524,8 @@
               <a:buNone/>
             </a:pPr>
             <a:r>
-              <a:rPr>
-                <a:hlinkClick r:id="rId3"/>
-              </a:rPr>
-              <a:t>The two walkthroughs use the Superman SMEs file. RH3 through RH6 use the Hot Ones file.</a:t>
+              <a:rPr/>
+              <a:t>Both walkthroughs use superman_smes_data.sav. The guides demonstrate the procedures with other variables; use the variables named in this worksheet. Keep your syntax and Output Viewer open as you work.</a:t>
             </a:r>
           </a:p>
         </p:txBody>
@@ -610,7 +607,7 @@
             </a:pPr>
             <a:r>
               <a:rPr/>
-              <a:t>RH3 through RH6 deliberately mix the two designs. Students should use the workflow, not copy variable names from a walkthrough.</a:t>
+              <a:t>Complete the H₀ and decision fields before the write-up. Include both means and standard deviations, then explain how the result relates to the prediction. A participant missing either score is excluded from this paired analysis, so its sample size can differ from RH1.</a:t>
             </a:r>
           </a:p>
         </p:txBody>
@@ -632,253 +629,7 @@
           <a:p>
             <a:fld id="{18BDFEC3-8487-43E8-A154-7C12CBC1FFF2}" type="slidenum">
               <a:rPr lang="en-US"/>
-              <a:t>11</a:t>
-            </a:fld>
-            <a:endParaRPr lang="en-US"/>
-          </a:p>
-        </p:txBody>
-      </p:sp>
-    </p:spTree>
-  </p:cSld>
-</p:notes>
-</file>
-
-<file path=ppt/notesSlides/notesSlide11.xml><?xml version="1.0" encoding="utf-8"?>
-<p:notes xmlns:a="http://schemas.openxmlformats.org/drawingml/2006/main" xmlns:r="http://schemas.openxmlformats.org/officeDocument/2006/relationships" xmlns:p="http://schemas.openxmlformats.org/presentationml/2006/main">
-  <p:cSld>
-    <p:spTree>
-      <p:nvGrpSpPr>
-        <p:cNvPr id="1" name=""/>
-        <p:cNvGrpSpPr/>
-        <p:nvPr/>
-      </p:nvGrpSpPr>
-      <p:grpSpPr>
-        <a:xfrm>
-          <a:off x="0" y="0"/>
-          <a:ext cx="0" cy="0"/>
-          <a:chOff x="0" y="0"/>
-          <a:chExt cx="0" cy="0"/>
-        </a:xfrm>
-      </p:grpSpPr>
-      <p:sp>
-        <p:nvSpPr>
-          <p:cNvPr id="2" name="Slide Image Placeholder 1"/>
-          <p:cNvSpPr>
-            <a:spLocks noGrp="1" noRot="1" noChangeAspect="1"/>
-          </p:cNvSpPr>
-          <p:nvPr>
-            <p:ph type="sldImg"/>
-          </p:nvPr>
-        </p:nvSpPr>
-        <p:spPr/>
-      </p:sp>
-      <p:sp>
-        <p:nvSpPr>
-          <p:cNvPr id="3" name="Notes Placeholder 2"/>
-          <p:cNvSpPr>
-            <a:spLocks noGrp="1"/>
-          </p:cNvSpPr>
-          <p:nvPr>
-            <p:ph type="body" idx="1"/>
-          </p:nvPr>
-        </p:nvSpPr>
-        <p:spPr/>
-        <p:txBody>
-          <a:bodyPr/>
-          <a:lstStyle/>
-          <a:p>
-            <a:pPr lvl="0" indent="0" marL="0">
-              <a:buNone/>
-            </a:pPr>
-            <a:r>
-              <a:rPr/>
-              <a:t>The worksheet supplies the exact transformed variables and the completed-challenge filter where required. Check that every analysis uses the intended active cases.</a:t>
-            </a:r>
-          </a:p>
-        </p:txBody>
-      </p:sp>
-      <p:sp>
-        <p:nvSpPr>
-          <p:cNvPr id="4" name="Slide Number Placeholder 3"/>
-          <p:cNvSpPr>
-            <a:spLocks noGrp="1"/>
-          </p:cNvSpPr>
-          <p:nvPr>
-            <p:ph type="sldNum" sz="quarter" idx="10"/>
-          </p:nvPr>
-        </p:nvSpPr>
-        <p:spPr/>
-        <p:txBody>
-          <a:bodyPr/>
-          <a:lstStyle/>
-          <a:p>
-            <a:fld id="{18BDFEC3-8487-43E8-A154-7C12CBC1FFF2}" type="slidenum">
-              <a:rPr lang="en-US"/>
-              <a:t>12</a:t>
-            </a:fld>
-            <a:endParaRPr lang="en-US"/>
-          </a:p>
-        </p:txBody>
-      </p:sp>
-    </p:spTree>
-  </p:cSld>
-</p:notes>
-</file>
-
-<file path=ppt/notesSlides/notesSlide12.xml><?xml version="1.0" encoding="utf-8"?>
-<p:notes xmlns:a="http://schemas.openxmlformats.org/drawingml/2006/main" xmlns:r="http://schemas.openxmlformats.org/officeDocument/2006/relationships" xmlns:p="http://schemas.openxmlformats.org/presentationml/2006/main">
-  <p:cSld>
-    <p:spTree>
-      <p:nvGrpSpPr>
-        <p:cNvPr id="1" name=""/>
-        <p:cNvGrpSpPr/>
-        <p:nvPr/>
-      </p:nvGrpSpPr>
-      <p:grpSpPr>
-        <a:xfrm>
-          <a:off x="0" y="0"/>
-          <a:ext cx="0" cy="0"/>
-          <a:chOff x="0" y="0"/>
-          <a:chExt cx="0" cy="0"/>
-        </a:xfrm>
-      </p:grpSpPr>
-      <p:sp>
-        <p:nvSpPr>
-          <p:cNvPr id="2" name="Slide Image Placeholder 1"/>
-          <p:cNvSpPr>
-            <a:spLocks noGrp="1" noRot="1" noChangeAspect="1"/>
-          </p:cNvSpPr>
-          <p:nvPr>
-            <p:ph type="sldImg"/>
-          </p:nvPr>
-        </p:nvSpPr>
-        <p:spPr/>
-      </p:sp>
-      <p:sp>
-        <p:nvSpPr>
-          <p:cNvPr id="3" name="Notes Placeholder 2"/>
-          <p:cNvSpPr>
-            <a:spLocks noGrp="1"/>
-          </p:cNvSpPr>
-          <p:nvPr>
-            <p:ph type="body" idx="1"/>
-          </p:nvPr>
-        </p:nvSpPr>
-        <p:spPr/>
-        <p:txBody>
-          <a:bodyPr/>
-          <a:lstStyle/>
-          <a:p>
-            <a:pPr lvl="0" indent="0" marL="0">
-              <a:buNone/>
-            </a:pPr>
-            <a:r>
-              <a:rPr/>
-              <a:t>This output is generated with create_apa_anova_descriptives_table(), matching the reporting workflow in the SPSS handouts. A graph with labeled means and uncertainty is also acceptable when the worksheet requests a figure.</a:t>
-            </a:r>
-          </a:p>
-        </p:txBody>
-      </p:sp>
-      <p:sp>
-        <p:nvSpPr>
-          <p:cNvPr id="4" name="Slide Number Placeholder 3"/>
-          <p:cNvSpPr>
-            <a:spLocks noGrp="1"/>
-          </p:cNvSpPr>
-          <p:nvPr>
-            <p:ph type="sldNum" sz="quarter" idx="10"/>
-          </p:nvPr>
-        </p:nvSpPr>
-        <p:spPr/>
-        <p:txBody>
-          <a:bodyPr/>
-          <a:lstStyle/>
-          <a:p>
-            <a:fld id="{18BDFEC3-8487-43E8-A154-7C12CBC1FFF2}" type="slidenum">
-              <a:rPr lang="en-US"/>
               <a:t>13</a:t>
-            </a:fld>
-            <a:endParaRPr lang="en-US"/>
-          </a:p>
-        </p:txBody>
-      </p:sp>
-    </p:spTree>
-  </p:cSld>
-</p:notes>
-</file>
-
-<file path=ppt/notesSlides/notesSlide13.xml><?xml version="1.0" encoding="utf-8"?>
-<p:notes xmlns:a="http://schemas.openxmlformats.org/drawingml/2006/main" xmlns:r="http://schemas.openxmlformats.org/officeDocument/2006/relationships" xmlns:p="http://schemas.openxmlformats.org/presentationml/2006/main">
-  <p:cSld>
-    <p:spTree>
-      <p:nvGrpSpPr>
-        <p:cNvPr id="1" name=""/>
-        <p:cNvGrpSpPr/>
-        <p:nvPr/>
-      </p:nvGrpSpPr>
-      <p:grpSpPr>
-        <a:xfrm>
-          <a:off x="0" y="0"/>
-          <a:ext cx="0" cy="0"/>
-          <a:chOff x="0" y="0"/>
-          <a:chExt cx="0" cy="0"/>
-        </a:xfrm>
-      </p:grpSpPr>
-      <p:sp>
-        <p:nvSpPr>
-          <p:cNvPr id="2" name="Slide Image Placeholder 1"/>
-          <p:cNvSpPr>
-            <a:spLocks noGrp="1" noRot="1" noChangeAspect="1"/>
-          </p:cNvSpPr>
-          <p:nvPr>
-            <p:ph type="sldImg"/>
-          </p:nvPr>
-        </p:nvSpPr>
-        <p:spPr/>
-      </p:sp>
-      <p:sp>
-        <p:nvSpPr>
-          <p:cNvPr id="3" name="Notes Placeholder 2"/>
-          <p:cNvSpPr>
-            <a:spLocks noGrp="1"/>
-          </p:cNvSpPr>
-          <p:nvPr>
-            <p:ph type="body" idx="1"/>
-          </p:nvPr>
-        </p:nvSpPr>
-        <p:spPr/>
-        <p:txBody>
-          <a:bodyPr/>
-          <a:lstStyle/>
-          <a:p>
-            <a:pPr lvl="0" indent="0" marL="0">
-              <a:buNone/>
-            </a:pPr>
-            <a:r>
-              <a:rPr/>
-              <a:t>The final reporting sequence works for both between- and within-groups analyses. The statistical sentence and the substantive interpretation must agree.</a:t>
-            </a:r>
-          </a:p>
-        </p:txBody>
-      </p:sp>
-      <p:sp>
-        <p:nvSpPr>
-          <p:cNvPr id="4" name="Slide Number Placeholder 3"/>
-          <p:cNvSpPr>
-            <a:spLocks noGrp="1"/>
-          </p:cNvSpPr>
-          <p:nvPr>
-            <p:ph type="sldNum" sz="quarter" idx="10"/>
-          </p:nvPr>
-        </p:nvSpPr>
-        <p:spPr/>
-        <p:txBody>
-          <a:bodyPr/>
-          <a:lstStyle/>
-          <a:p>
-            <a:fld id="{18BDFEC3-8487-43E8-A154-7C12CBC1FFF2}" type="slidenum">
-              <a:rPr lang="en-US"/>
-              <a:t>14</a:t>
             </a:fld>
             <a:endParaRPr lang="en-US"/>
           </a:p>
@@ -938,7 +689,7 @@
             </a:pPr>
             <a:r>
               <a:rPr/>
-              <a:t>Keep the dataset and saved syntax open together. Inspect variables and cases in the Data Editor; reproduce every command in the Syntax Editor.</a:t>
+              <a:t>Each row in the SMES dataset represents a participant. RH1 compares emotional impact across height-gap groups. RH2 compares emotional impact and aesthetic appeal from the same participant. The pairing determines the design.</a:t>
             </a:r>
           </a:p>
         </p:txBody>
@@ -960,7 +711,7 @@
           <a:p>
             <a:fld id="{18BDFEC3-8487-43E8-A154-7C12CBC1FFF2}" type="slidenum">
               <a:rPr lang="en-US"/>
-              <a:t>3</a:t>
+              <a:t>4</a:t>
             </a:fld>
             <a:endParaRPr lang="en-US"/>
           </a:p>
@@ -1020,7 +771,7 @@
             </a:pPr>
             <a:r>
               <a:rPr/>
-              <a:t>The Output Viewer accumulates tables, charts, warnings, and processing notes. Keep it open beside the data and syntax windows, and export only the results needed for the worksheet or report.</a:t>
+              <a:t>Have students state the prediction before looking at the means. Check Variable View before recoding. A missing-value code must not enter the analysis as a score or category.</a:t>
             </a:r>
           </a:p>
         </p:txBody>
@@ -1042,7 +793,7 @@
           <a:p>
             <a:fld id="{18BDFEC3-8487-43E8-A154-7C12CBC1FFF2}" type="slidenum">
               <a:rPr lang="en-US"/>
-              <a:t>4</a:t>
+              <a:t>5</a:t>
             </a:fld>
             <a:endParaRPr lang="en-US"/>
           </a:p>
@@ -1102,7 +853,7 @@
             </a:pPr>
             <a:r>
               <a:rPr/>
-              <a:t>Identify the unit of observation rather than deciding from how the columns happen to appear in SPSS.</a:t>
+              <a:t>This follows RH1 steps 3–4. Combine original codes 1 and 2 into the small group; recode original code 3 as the big group. Keep height_gap and create height_gap_2cat separately. No case selection is required. Check the new codes against the original variable.</a:t>
             </a:r>
           </a:p>
         </p:txBody>
@@ -1124,7 +875,7 @@
           <a:p>
             <a:fld id="{18BDFEC3-8487-43E8-A154-7C12CBC1FFF2}" type="slidenum">
               <a:rPr lang="en-US"/>
-              <a:t>5</a:t>
+              <a:t>6</a:t>
             </a:fld>
             <a:endParaRPr lang="en-US"/>
           </a:p>
@@ -1184,7 +935,7 @@
             </a:pPr>
             <a:r>
               <a:rPr/>
-              <a:t>With two levels, the omnibus test answers the only mean comparison. With three or more levels, a significant omnibus test can justify follow-up comparisons.</a:t>
+              <a:t>Use height_gap_2cat as the factor and emotional_impact as the dependent variable. Start with the group means, standard deviations, and sample sizes in the Descriptives table. The analysis excludes cases missing either required value.</a:t>
             </a:r>
           </a:p>
         </p:txBody>
@@ -1206,7 +957,7 @@
           <a:p>
             <a:fld id="{18BDFEC3-8487-43E8-A154-7C12CBC1FFF2}" type="slidenum">
               <a:rPr lang="en-US"/>
-              <a:t>6</a:t>
+              <a:t>7</a:t>
             </a:fld>
             <a:endParaRPr lang="en-US"/>
           </a:p>
@@ -1266,7 +1017,7 @@
             </a:pPr>
             <a:r>
               <a:rPr/>
-              <a:t>RH1 combines minimal and average height gaps into one category and compares them with big gaps. Verify the recode with frequencies before running the ANOVA.</a:t>
+              <a:t>MSe comes from the Within Groups row, under Mean Square. Read the two degrees of freedom from their respective rows. Students need the group means as well as p to evaluate the prediction; a higher observed mean alone does not establish a significant difference.</a:t>
             </a:r>
           </a:p>
         </p:txBody>
@@ -1288,7 +1039,7 @@
           <a:p>
             <a:fld id="{18BDFEC3-8487-43E8-A154-7C12CBC1FFF2}" type="slidenum">
               <a:rPr lang="en-US"/>
-              <a:t>7</a:t>
+              <a:t>9</a:t>
             </a:fld>
             <a:endParaRPr lang="en-US"/>
           </a:p>
@@ -1348,7 +1099,7 @@
             </a:pPr>
             <a:r>
               <a:rPr/>
-              <a:t>Compare the two descriptive means before interpreting F. Record MSe and effect size for the write-up, even when the result is not significant.</a:t>
+              <a:t>Use the worksheet’s results table and the simple between-groups guide. Distinguish the decision about H₀ from whether the observed direction supports RH1. Finish the write-up and checker screenshot before starting RH2.</a:t>
             </a:r>
           </a:p>
         </p:txBody>
@@ -1370,7 +1121,7 @@
           <a:p>
             <a:fld id="{18BDFEC3-8487-43E8-A154-7C12CBC1FFF2}" type="slidenum">
               <a:rPr lang="en-US"/>
-              <a:t>8</a:t>
+              <a:t>10</a:t>
             </a:fld>
             <a:endParaRPr lang="en-US"/>
           </a:p>
@@ -1430,7 +1181,7 @@
             </a:pPr>
             <a:r>
               <a:rPr/>
-              <a:t>The result is not statistically significant at the .05 level. Students should still report the descriptive pattern and effect size accurately.</a:t>
+              <a:t>Keep the same SMES file open and check the labels and missing-value declarations for both score variables. Each participant supplies a pair of scores. This is not a comparison of two independent groups.</a:t>
             </a:r>
           </a:p>
         </p:txBody>
@@ -1452,7 +1203,7 @@
           <a:p>
             <a:fld id="{18BDFEC3-8487-43E8-A154-7C12CBC1FFF2}" type="slidenum">
               <a:rPr lang="en-US"/>
-              <a:t>9</a:t>
+              <a:t>11</a:t>
             </a:fld>
             <a:endParaRPr lang="en-US"/>
           </a:p>
@@ -1512,7 +1263,7 @@
             </a:pPr>
             <a:r>
               <a:rPr/>
-              <a:t>No transformation or selection is required. With two repeated levels, sphericity is automatic. Define the repeated factor and assign the two outcomes in worksheet order.</a:t>
+              <a:t>Assign emotional_impact first and aesthetic_appeal second, as the worksheet directs. In Tests of Within-Subjects Effects, find subscale and Error(subscale). Use the error row for MSe and the error degrees of freedom. With two repeated levels, use the Sphericity Assumed rows.</a:t>
             </a:r>
           </a:p>
         </p:txBody>
@@ -1534,7 +1285,7 @@
           <a:p>
             <a:fld id="{18BDFEC3-8487-43E8-A154-7C12CBC1FFF2}" type="slidenum">
               <a:rPr lang="en-US"/>
-              <a:t>10</a:t>
+              <a:t>12</a:t>
             </a:fld>
             <a:endParaRPr lang="en-US"/>
           </a:p>
@@ -2803,8 +2554,8 @@
         </p:nvSpPr>
         <p:spPr>
           <a:xfrm>
-            <a:off x="1583436" y="2313433"/>
-            <a:ext cx="4270248" cy="704087"/>
+            <a:off x="1097280" y="2313433"/>
+            <a:ext cx="4907280" cy="548640"/>
           </a:xfrm>
         </p:spPr>
         <p:txBody>
@@ -2876,8 +2627,8 @@
         </p:nvSpPr>
         <p:spPr>
           <a:xfrm>
-            <a:off x="1583436" y="3143250"/>
-            <a:ext cx="4270248" cy="2596776"/>
+            <a:off x="1097280" y="2926080"/>
+            <a:ext cx="4907280" cy="3177540"/>
           </a:xfrm>
         </p:spPr>
         <p:txBody>
@@ -2933,8 +2684,8 @@
         </p:nvSpPr>
         <p:spPr>
           <a:xfrm>
-            <a:off x="6338316" y="3143250"/>
-            <a:ext cx="4253484" cy="2596776"/>
+            <a:off x="6187440" y="2926080"/>
+            <a:ext cx="4907280" cy="3177540"/>
           </a:xfrm>
         </p:spPr>
         <p:txBody>
@@ -2994,8 +2745,8 @@
         </p:nvSpPr>
         <p:spPr>
           <a:xfrm>
-            <a:off x="6338316" y="2313433"/>
-            <a:ext cx="4270248" cy="704087"/>
+            <a:off x="6187440" y="2313433"/>
+            <a:ext cx="4907280" cy="548640"/>
           </a:xfrm>
         </p:spPr>
         <p:txBody>
@@ -3130,7 +2881,12 @@
             <p:ph type="title"/>
           </p:nvPr>
         </p:nvSpPr>
-        <p:spPr/>
+        <p:spPr>
+          <a:xfrm>
+            <a:off x="1097280" y="964692"/>
+            <a:ext cx="9997440" cy="1188720"/>
+          </a:xfrm>
+        </p:spPr>
         <p:txBody>
           <a:bodyPr/>
           <a:lstStyle/>
@@ -4725,9 +4481,7 @@
               <a:buNone/>
             </a:pPr>
             <a:r>
-              <a:rPr>
-                <a:hlinkClick r:id="rId2"/>
-              </a:rPr>
+              <a:rPr/>
               <a:t>Between-Groups and Within-Groups ANOVA</a:t>
             </a:r>
           </a:p>
@@ -4817,7 +4571,7 @@
             </a:pPr>
             <a:r>
               <a:rPr/>
-              <a:t>9 Run the RH2 repeated test</a:t>
+              <a:t>7 Finish the RH1 write-up</a:t>
             </a:r>
           </a:p>
         </p:txBody>
@@ -4837,30 +4591,61 @@
           <a:bodyPr/>
           <a:lstStyle/>
           <a:p>
-            <a:pPr lvl="0" indent="0">
+            <a:pPr lvl="0" indent="0" marL="0">
               <a:buNone/>
             </a:pPr>
             <a:r>
-              <a:rPr>
-                <a:latin typeface="Courier"/>
-              </a:rPr>
-              <a:t>GLM emotional_impact aesthetic_appeal
-  /WSFACTOR=RatingType 2
-  /PRINT=DESCRIPTIVE ETASQ
-  /EMMEANS=TABLES(RatingType) COMPARE.</a:t>
-            </a:r>
-          </a:p>
-          <a:p>
-            <a:pPr lvl="0" indent="0" marL="0">
-              <a:buNone/>
-            </a:pPr>
-            <a:r>
-              <a:rPr b="1"/>
-              <a:t>RH2:</a:t>
-            </a:r>
-            <a:r>
               <a:rPr/>
-              <a:t> Compare emotional impact with aesthetic appeal for the same films.</a:t>
+              <a:t>[RH1 · Steps 6–9]</a:t>
+            </a:r>
+          </a:p>
+          <a:p>
+            <a:pPr lvl="0"/>
+            <a:r>
+              <a:rPr/>
+              <a:t>State H₀ and decide whether the result supports RH1</a:t>
+            </a:r>
+          </a:p>
+          <a:p>
+            <a:pPr lvl="0"/>
+            <a:r>
+              <a:rPr/>
+              <a:t>Write the result with group means, SDs, </a:t>
+            </a:r>
+            <a:r>
+              <a:rPr i="1"/>
+              <a:t>F</a:t>
+            </a:r>
+            <a:r>
+              <a:rPr/>
+              <a:t>, both </a:t>
+            </a:r>
+            <a:r>
+              <a:rPr i="1"/>
+              <a:t>df</a:t>
+            </a:r>
+            <a:r>
+              <a:rPr/>
+              <a:t>, </a:t>
+            </a:r>
+            <a:r>
+              <a:rPr i="1"/>
+              <a:t>MSe</a:t>
+            </a:r>
+            <a:r>
+              <a:rPr/>
+              <a:t>, and </a:t>
+            </a:r>
+            <a:r>
+              <a:rPr i="1"/>
+              <a:t>p</a:t>
+            </a:r>
+          </a:p>
+          <a:p>
+            <a:pPr lvl="0"/>
+            <a:r>
+              <a:rPr/>
+              <a:t>Add the required screenshot of correct checker answers</a:t>
             </a:r>
           </a:p>
         </p:txBody>
@@ -4912,7 +4697,7 @@
             </a:pPr>
             <a:r>
               <a:rPr/>
-              <a:t>10 Repeat the steps for Hot Ones</a:t>
+              <a:t>8 Compare the paired RH2 scores</a:t>
             </a:r>
           </a:p>
         </p:txBody>
@@ -4932,56 +4717,42 @@
           <a:bodyPr/>
           <a:lstStyle/>
           <a:p>
-            <a:pPr lvl="0" indent="-457200" marL="457200">
-              <a:buAutoNum type="arabicPeriod"/>
+            <a:pPr lvl="0" indent="0" marL="0">
+              <a:buNone/>
             </a:pPr>
             <a:r>
               <a:rPr/>
-              <a:t>Identify between- or within-groups.</a:t>
-            </a:r>
-          </a:p>
-          <a:p>
-            <a:pPr lvl="0" indent="-457200" marL="457200">
-              <a:buAutoNum type="arabicPeriod"/>
+              <a:t>[RH2 · Steps 1–4]</a:t>
+            </a:r>
+          </a:p>
+          <a:p>
+            <a:pPr lvl="0" indent="0" marL="0">
+              <a:buNone/>
             </a:pPr>
             <a:r>
+              <a:rPr b="1"/>
+              <a:t>Emotional impact and aesthetic appeal</a:t>
+            </a:r>
+          </a:p>
+          <a:p>
+            <a:pPr lvl="0"/>
+            <a:r>
               <a:rPr/>
-              <a:t>Run the worksheet transformation.</a:t>
-            </a:r>
-          </a:p>
-          <a:p>
-            <a:pPr lvl="0" indent="-457200" marL="457200">
-              <a:buAutoNum type="arabicPeriod"/>
-            </a:pPr>
+              <a:t>Two scores from each participant</a:t>
+            </a:r>
+          </a:p>
+          <a:p>
+            <a:pPr lvl="0"/>
             <a:r>
               <a:rPr/>
-              <a:t>Apply the required selection.</a:t>
-            </a:r>
-          </a:p>
-          <a:p>
-            <a:pPr lvl="0" indent="-457200" marL="457200">
-              <a:buAutoNum type="arabicPeriod"/>
-            </a:pPr>
+              <a:t>Which score does RH2 predict will be higher?</a:t>
+            </a:r>
+          </a:p>
+          <a:p>
+            <a:pPr lvl="0"/>
             <a:r>
               <a:rPr/>
-              <a:t>Compare means, then interpret </a:t>
-            </a:r>
-            <a:r>
-              <a:rPr i="1"/>
-              <a:t>F</a:t>
-            </a:r>
-            <a:r>
-              <a:rPr/>
-              <a:t>.</a:t>
-            </a:r>
-          </a:p>
-          <a:p>
-            <a:pPr lvl="0" indent="-457200" marL="457200">
-              <a:buAutoNum type="arabicPeriod"/>
-            </a:pPr>
-            <a:r>
-              <a:rPr/>
-              <a:t>Reset the filter before the next RH.</a:t>
+              <a:t>No transformation or case selection</a:t>
             </a:r>
           </a:p>
         </p:txBody>
@@ -5033,7 +4804,7 @@
             </a:pPr>
             <a:r>
               <a:rPr/>
-              <a:t>11 Complete RH3 through RH6</a:t>
+              <a:t>9 Run the RH2 within-groups ANOVA</a:t>
             </a:r>
           </a:p>
         </p:txBody>
@@ -5053,56 +4824,19 @@
           <a:bodyPr/>
           <a:lstStyle/>
           <a:p>
-            <a:pPr lvl="0"/>
-            <a:r>
-              <a:rPr b="1"/>
-              <a:t>RH3:</a:t>
-            </a:r>
-            <a:r>
-              <a:rPr/>
-              <a:t> first versus tenth sauce heat</a:t>
-            </a:r>
-          </a:p>
-          <a:p>
-            <a:pPr lvl="0"/>
-            <a:r>
-              <a:rPr b="1"/>
-              <a:t>RH4:</a:t>
-            </a:r>
-            <a:r>
-              <a:rPr/>
-              <a:t> actor status predicting views</a:t>
-            </a:r>
-          </a:p>
-          <a:p>
-            <a:pPr lvl="0"/>
-            <a:r>
-              <a:rPr b="1"/>
-              <a:t>RH5:</a:t>
-            </a:r>
-            <a:r>
-              <a:rPr/>
-              <a:t> comments versus likes</a:t>
-            </a:r>
-          </a:p>
-          <a:p>
-            <a:pPr lvl="0"/>
-            <a:r>
-              <a:rPr b="1"/>
-              <a:t>RH6:</a:t>
-            </a:r>
-            <a:r>
-              <a:rPr/>
-              <a:t> age group predicting likes</a:t>
-            </a:r>
-          </a:p>
-          <a:p>
-            <a:pPr lvl="0" indent="0" marL="0">
+            <a:pPr lvl="0" indent="0">
               <a:buNone/>
             </a:pPr>
             <a:r>
-              <a:rPr/>
-              <a:t>Save the transformation, filter, and analysis syntax for each.</a:t>
+              <a:rPr>
+                <a:latin typeface="Courier"/>
+              </a:rPr>
+              <a:t>GLM emotional_impact aesthetic_appeal
+  /WSFACTOR=subscale 2 Polynomial
+  /METHOD=SSTYPE(3)
+  /PRINT=DESCRIPTIVE
+  /CRITERIA=ALPHA(.05)
+  /WSDESIGN=subscale.</a:t>
             </a:r>
           </a:p>
         </p:txBody>
@@ -5154,79 +4888,22 @@
             </a:pPr>
             <a:r>
               <a:rPr/>
-              <a:t>12 Make the APA descriptives table</a:t>
-            </a:r>
-          </a:p>
-        </p:txBody>
-      </p:sp>
-      <p:pic>
-        <p:nvPicPr>
-          <p:cNvPr descr="APA-style table of emotional-impact means and standard deviations for minimal or average height gaps versus big height gaps" id="0" name="Picture 1"/>
-          <p:cNvPicPr>
-            <a:picLocks noGrp="1" noChangeAspect="1"/>
-          </p:cNvPicPr>
-          <p:nvPr/>
-        </p:nvPicPr>
-        <p:blipFill>
-          <a:blip r:embed="rId3"/>
-          <a:stretch>
-            <a:fillRect/>
-          </a:stretch>
-        </p:blipFill>
-        <p:spPr bwMode="auto">
-          <a:xfrm>
-            <a:off x="1092200" y="3086100"/>
-            <a:ext cx="9994900" cy="2184400"/>
-          </a:xfrm>
-          <a:prstGeom prst="rect">
-            <a:avLst/>
-          </a:prstGeom>
-          <a:noFill/>
-          <a:ln w="9525">
-            <a:noFill/>
-            <a:headEnd/>
-            <a:tailEnd/>
-          </a:ln>
-        </p:spPr>
-      </p:pic>
-    </p:spTree>
-  </p:cSld>
-</p:sld>
-</file>
-
-<file path=ppt/slides/slide14.xml><?xml version="1.0" encoding="utf-8"?>
-<p:sld xmlns:a="http://schemas.openxmlformats.org/drawingml/2006/main" xmlns:r="http://schemas.openxmlformats.org/officeDocument/2006/relationships" xmlns:p="http://schemas.openxmlformats.org/presentationml/2006/main">
-  <p:cSld>
-    <p:spTree>
-      <p:nvGrpSpPr>
-        <p:cNvPr id="1" name=""/>
-        <p:cNvGrpSpPr/>
-        <p:nvPr/>
-      </p:nvGrpSpPr>
-      <p:grpSpPr>
-        <a:xfrm>
-          <a:off x="0" y="0"/>
-          <a:ext cx="0" cy="0"/>
-          <a:chOff x="0" y="0"/>
-          <a:chExt cx="0" cy="0"/>
-        </a:xfrm>
-      </p:grpSpPr>
-      <p:sp>
-        <p:nvSpPr>
-          <p:cNvPr id="2" name="Title 1"/>
-          <p:cNvSpPr>
-            <a:spLocks noGrp="1"/>
-          </p:cNvSpPr>
-          <p:nvPr>
-            <p:ph type="title"/>
-          </p:nvPr>
-        </p:nvSpPr>
-        <p:spPr>
-          <a:xfrm>
-            <a:off x="1097280" y="964692"/>
-            <a:ext cx="9997440" cy="1188720"/>
-          </a:xfrm>
-        </p:spPr>
+              <a:t>10 Finish the RH2 write-up</a:t>
+            </a:r>
+          </a:p>
+        </p:txBody>
+      </p:sp>
+      <p:sp>
+        <p:nvSpPr>
+          <p:cNvPr id="3" name="Content Placeholder 2"/>
+          <p:cNvSpPr>
+            <a:spLocks noGrp="1"/>
+          </p:cNvSpPr>
+          <p:nvPr>
+            <p:ph idx="1"/>
+          </p:nvPr>
+        </p:nvSpPr>
+        <p:spPr/>
         <p:txBody>
           <a:bodyPr/>
           <a:lstStyle/>
@@ -5236,38 +4913,18 @@
             </a:pPr>
             <a:r>
               <a:rPr/>
-              <a:t>13 Write the ANOVA result</a:t>
-            </a:r>
-          </a:p>
-        </p:txBody>
-      </p:sp>
-      <p:sp>
-        <p:nvSpPr>
-          <p:cNvPr id="3" name="Content Placeholder 2"/>
-          <p:cNvSpPr>
-            <a:spLocks noGrp="1"/>
-          </p:cNvSpPr>
-          <p:nvPr>
-            <p:ph idx="1"/>
-          </p:nvPr>
-        </p:nvSpPr>
-        <p:spPr/>
-        <p:txBody>
-          <a:bodyPr/>
-          <a:lstStyle/>
-          <a:p>
-            <a:pPr lvl="0" indent="-457200" marL="457200">
-              <a:buAutoNum type="arabicPeriod"/>
-            </a:pPr>
+              <a:t>[RH2 · Steps 6–9]</a:t>
+            </a:r>
+          </a:p>
+          <a:p>
+            <a:pPr lvl="0"/>
             <a:r>
               <a:rPr/>
-              <a:t>Describe the group or condition means.</a:t>
-            </a:r>
-          </a:p>
-          <a:p>
-            <a:pPr lvl="0" indent="-457200" marL="457200">
-              <a:buAutoNum type="arabicPeriod"/>
-            </a:pPr>
+              <a:t>Use descriptives for the complete score pairs</a:t>
+            </a:r>
+          </a:p>
+          <a:p>
+            <a:pPr lvl="0"/>
             <a:r>
               <a:rPr/>
               <a:t>Report </a:t>
@@ -5278,7 +4935,7 @@
             </a:r>
             <a:r>
               <a:rPr/>
-              <a:t>(</a:t>
+              <a:t>, both </a:t>
             </a:r>
             <a:r>
               <a:rPr i="1"/>
@@ -5286,15 +4943,7 @@
             </a:r>
             <a:r>
               <a:rPr/>
-              <a:t>1, </a:t>
-            </a:r>
-            <a:r>
-              <a:rPr i="1"/>
-              <a:t>df</a:t>
-            </a:r>
-            <a:r>
-              <a:rPr/>
-              <a:t>2), </a:t>
+              <a:t>, </a:t>
             </a:r>
             <a:r>
               <a:rPr i="1"/>
@@ -5308,36 +4957,19 @@
               <a:rPr i="1"/>
               <a:t>p</a:t>
             </a:r>
+          </a:p>
+          <a:p>
+            <a:pPr lvl="0"/>
             <a:r>
               <a:rPr/>
-              <a:t>.</a:t>
-            </a:r>
-          </a:p>
-          <a:p>
-            <a:pPr lvl="0" indent="-457200" marL="457200">
-              <a:buAutoNum type="arabicPeriod"/>
-            </a:pPr>
+              <a:t>Explain whether the result supports RH2</a:t>
+            </a:r>
+          </a:p>
+          <a:p>
+            <a:pPr lvl="0"/>
             <a:r>
               <a:rPr/>
-              <a:t>Report effect size.</a:t>
-            </a:r>
-          </a:p>
-          <a:p>
-            <a:pPr lvl="0" indent="-457200" marL="457200">
-              <a:buAutoNum type="arabicPeriod"/>
-            </a:pPr>
-            <a:r>
-              <a:rPr/>
-              <a:t>State whether the RH is supported.</a:t>
-            </a:r>
-          </a:p>
-          <a:p>
-            <a:pPr lvl="0" indent="-457200" marL="457200">
-              <a:buAutoNum type="arabicPeriod"/>
-            </a:pPr>
-            <a:r>
-              <a:rPr/>
-              <a:t>Refer to the table or figure and add checker proof.</a:t>
+              <a:t>Add the required screenshot of correct checker answers</a:t>
             </a:r>
           </a:p>
         </p:txBody>
@@ -5389,14 +5021,14 @@
             </a:pPr>
             <a:r>
               <a:rPr/>
-              <a:t>1 Download the Lab 8 files</a:t>
-            </a:r>
-          </a:p>
-        </p:txBody>
-      </p:sp>
-      <p:sp>
-        <p:nvSpPr>
-          <p:cNvPr id="1001" name="card-steel" descr="card: Worksheet. Download worksheet"/>
+              <a:t>1 Open the Lab 08 files</a:t>
+            </a:r>
+          </a:p>
+        </p:txBody>
+      </p:sp>
+      <p:sp>
+        <p:nvSpPr>
+          <p:cNvPr id="1001" name="card-steel" descr="card: Walkthrough data. Superman SMES"/>
           <p:cNvSpPr/>
           <p:nvPr/>
         </p:nvSpPr>
@@ -5432,7 +5064,7 @@
                   <a:srgbClr val="010B13"/>
                 </a:solidFill>
               </a:rPr>
-              <a:t>Worksheet</a:t>
+              <a:t>Walkthrough data</a:t>
             </a:r>
           </a:p>
           <a:p>
@@ -5444,14 +5076,20 @@
                 </a:solidFill>
                 <a:hlinkClick r:id="rId3"/>
               </a:rPr>
-              <a:t>Download worksheet</a:t>
-            </a:r>
-          </a:p>
-        </p:txBody>
-      </p:sp>
-      <p:sp>
-        <p:nvSpPr>
-          <p:cNvPr id="1002" name="card-rail" descr=""/>
+              <a:t>Superman SMES</a:t>
+            </a:r>
+          </a:p>
+        </p:txBody>
+      </p:sp>
+      <p:sp>
+        <p:nvSpPr>
+          <p:cNvPr id="1002" name="card-rail" descr="">
+            <a:extLst>
+              <a:ext uri="{C183D7F6-B498-43B3-948B-1728B52AA6E4}">
+                <adec:decorative xmlns:adec="http://schemas.microsoft.com/office/drawing/2017/decorative" val="1"/>
+              </a:ext>
+            </a:extLst>
+          </p:cNvPr>
           <p:cNvSpPr/>
           <p:nvPr/>
         </p:nvSpPr>
@@ -5482,7 +5120,7 @@
       </p:sp>
       <p:sp>
         <p:nvSpPr>
-          <p:cNvPr id="1003" name="card-steel" descr="card: Datasets. Superman SMEs Hot Ones"/>
+          <p:cNvPr id="1003" name="card-steel" descr="card: Simple SPSS guides. Between-groups PDF Within-groups PDF"/>
           <p:cNvSpPr/>
           <p:nvPr/>
         </p:nvSpPr>
@@ -5518,18 +5156,7 @@
                   <a:srgbClr val="010B13"/>
                 </a:solidFill>
               </a:rPr>
-              <a:t>Datasets</a:t>
-            </a:r>
-          </a:p>
-          <a:p>
-            <a:pPr algn="l"/>
-            <a:r>
-              <a:rPr lang="en-US" sz="2000" b="0" dirty="0">
-                <a:solidFill>
-                  <a:srgbClr val="010B13"/>
-                </a:solidFill>
-              </a:rPr>
-              <a:t>Superman SMEs</a:t>
+              <a:t>Simple SPSS guides</a:t>
             </a:r>
           </a:p>
           <a:p>
@@ -5541,93 +5168,7 @@
                 </a:solidFill>
                 <a:hlinkClick r:id="rId4"/>
               </a:rPr>
-              <a:t>Hot Ones</a:t>
-            </a:r>
-          </a:p>
-        </p:txBody>
-      </p:sp>
-      <p:sp>
-        <p:nvSpPr>
-          <p:cNvPr id="1004" name="card-rail" descr=""/>
-          <p:cNvSpPr/>
-          <p:nvPr/>
-        </p:nvSpPr>
-        <p:spPr>
-          <a:xfrm>
-            <a:off x="6167628" y="2633472"/>
-            <a:ext cx="54864" cy="1310640"/>
-          </a:xfrm>
-          <a:prstGeom prst="roundRect">
-            <a:avLst>
-              <a:gd name="adj" fmla="val 20000"/>
-            </a:avLst>
-          </a:prstGeom>
-          <a:solidFill>
-            <a:srgbClr val="010B13"/>
-          </a:solidFill>
-          <a:ln>
-            <a:noFill/>
-          </a:ln>
-        </p:spPr>
-        <p:txBody>
-          <a:bodyPr lIns="182880" tIns="182880" rIns="182880" bIns="182880" anchor="t" wrap="square">
-            <a:normAutofit/>
-          </a:bodyPr>
-          <a:lstStyle/>
-          <a:p/>
-        </p:txBody>
-      </p:sp>
-      <p:sp>
-        <p:nvSpPr>
-          <p:cNvPr id="1005" name="card-steel" descr="card: Between-groups guides. ANOVA Bar graph"/>
-          <p:cNvSpPr/>
-          <p:nvPr/>
-        </p:nvSpPr>
-        <p:spPr>
-          <a:xfrm>
-            <a:off x="1097280" y="4090416"/>
-            <a:ext cx="4924044" cy="1310640"/>
-          </a:xfrm>
-          <a:prstGeom prst="roundRect">
-            <a:avLst>
-              <a:gd name="adj" fmla="val 6000"/>
-            </a:avLst>
-          </a:prstGeom>
-          <a:solidFill>
-            <a:srgbClr val="FEFDFA"/>
-          </a:solidFill>
-          <a:ln w="19050">
-            <a:solidFill>
-              <a:srgbClr val="CCCCCC"/>
-            </a:solidFill>
-          </a:ln>
-        </p:spPr>
-        <p:txBody>
-          <a:bodyPr lIns="182880" tIns="182880" rIns="182880" bIns="182880" anchor="t" wrap="square">
-            <a:normAutofit/>
-          </a:bodyPr>
-          <a:lstStyle/>
-          <a:p>
-            <a:pPr algn="l"/>
-            <a:r>
-              <a:rPr lang="en-US" sz="2200" b="1" dirty="0">
-                <a:solidFill>
-                  <a:srgbClr val="010B13"/>
-                </a:solidFill>
-              </a:rPr>
-              <a:t>Between-groups guides</a:t>
-            </a:r>
-          </a:p>
-          <a:p>
-            <a:pPr algn="l"/>
-            <a:r>
-              <a:rPr lang="en-US" sz="2000" b="0" dirty="0">
-                <a:solidFill>
-                  <a:srgbClr val="010B13"/>
-                </a:solidFill>
-                <a:hlinkClick r:id="rId6"/>
-              </a:rPr>
-              <a:t>ANOVA</a:t>
+              <a:t>Between-groups PDF</a:t>
             </a:r>
           </a:p>
           <a:p>
@@ -5639,130 +5180,27 @@
                 </a:solidFill>
                 <a:hlinkClick r:id="rId5"/>
               </a:rPr>
-              <a:t>Bar graph</a:t>
-            </a:r>
-          </a:p>
-        </p:txBody>
-      </p:sp>
-      <p:sp>
-        <p:nvSpPr>
-          <p:cNvPr id="1006" name="card-rail" descr=""/>
+              <a:t>Within-groups PDF</a:t>
+            </a:r>
+          </a:p>
+        </p:txBody>
+      </p:sp>
+      <p:sp>
+        <p:nvSpPr>
+          <p:cNvPr id="1004" name="card-rail" descr="">
+            <a:extLst>
+              <a:ext uri="{C183D7F6-B498-43B3-948B-1728B52AA6E4}">
+                <adec:decorative xmlns:adec="http://schemas.microsoft.com/office/drawing/2017/decorative" val="1"/>
+              </a:ext>
+            </a:extLst>
+          </p:cNvPr>
           <p:cNvSpPr/>
           <p:nvPr/>
         </p:nvSpPr>
         <p:spPr>
           <a:xfrm>
-            <a:off x="1097280" y="4090416"/>
+            <a:off x="6167628" y="2633472"/>
             <a:ext cx="54864" cy="1310640"/>
-          </a:xfrm>
-          <a:prstGeom prst="roundRect">
-            <a:avLst>
-              <a:gd name="adj" fmla="val 20000"/>
-            </a:avLst>
-          </a:prstGeom>
-          <a:solidFill>
-            <a:srgbClr val="010B13"/>
-          </a:solidFill>
-          <a:ln>
-            <a:noFill/>
-          </a:ln>
-        </p:spPr>
-        <p:txBody>
-          <a:bodyPr lIns="182880" tIns="182880" rIns="182880" bIns="182880" anchor="t" wrap="square">
-            <a:normAutofit/>
-          </a:bodyPr>
-          <a:lstStyle/>
-          <a:p/>
-        </p:txBody>
-      </p:sp>
-      <p:sp>
-        <p:nvSpPr>
-          <p:cNvPr id="1007" name="card-steel" descr="card: Within-groups guides. ANOVA Bar graph Paired test"/>
-          <p:cNvSpPr/>
-          <p:nvPr/>
-        </p:nvSpPr>
-        <p:spPr>
-          <a:xfrm>
-            <a:off x="6167628" y="4090416"/>
-            <a:ext cx="4924044" cy="1615440"/>
-          </a:xfrm>
-          <a:prstGeom prst="roundRect">
-            <a:avLst>
-              <a:gd name="adj" fmla="val 6000"/>
-            </a:avLst>
-          </a:prstGeom>
-          <a:solidFill>
-            <a:srgbClr val="FEFDFA"/>
-          </a:solidFill>
-          <a:ln w="19050">
-            <a:solidFill>
-              <a:srgbClr val="CCCCCC"/>
-            </a:solidFill>
-          </a:ln>
-        </p:spPr>
-        <p:txBody>
-          <a:bodyPr lIns="182880" tIns="182880" rIns="182880" bIns="182880" anchor="t" wrap="square">
-            <a:normAutofit/>
-          </a:bodyPr>
-          <a:lstStyle/>
-          <a:p>
-            <a:pPr algn="l"/>
-            <a:r>
-              <a:rPr lang="en-US" sz="2200" b="1" dirty="0">
-                <a:solidFill>
-                  <a:srgbClr val="010B13"/>
-                </a:solidFill>
-              </a:rPr>
-              <a:t>Within-groups guides</a:t>
-            </a:r>
-          </a:p>
-          <a:p>
-            <a:pPr algn="l"/>
-            <a:r>
-              <a:rPr lang="en-US" sz="2000" b="0" dirty="0">
-                <a:solidFill>
-                  <a:srgbClr val="010B13"/>
-                </a:solidFill>
-              </a:rPr>
-              <a:t>ANOVA</a:t>
-            </a:r>
-          </a:p>
-          <a:p>
-            <a:pPr algn="l"/>
-            <a:r>
-              <a:rPr lang="en-US" sz="2000" b="0" dirty="0">
-                <a:solidFill>
-                  <a:srgbClr val="010B13"/>
-                </a:solidFill>
-                <a:hlinkClick r:id="rId7"/>
-              </a:rPr>
-              <a:t>Bar graph</a:t>
-            </a:r>
-          </a:p>
-          <a:p>
-            <a:pPr algn="l"/>
-            <a:r>
-              <a:rPr lang="en-US" sz="2000" b="0" dirty="0">
-                <a:solidFill>
-                  <a:srgbClr val="010B13"/>
-                </a:solidFill>
-                <a:hlinkClick r:id="rId8"/>
-              </a:rPr>
-              <a:t>Paired test</a:t>
-            </a:r>
-          </a:p>
-        </p:txBody>
-      </p:sp>
-      <p:sp>
-        <p:nvSpPr>
-          <p:cNvPr id="1008" name="card-rail" descr=""/>
-          <p:cNvSpPr/>
-          <p:nvPr/>
-        </p:nvSpPr>
-        <p:spPr>
-          <a:xfrm>
-            <a:off x="6167628" y="4090416"/>
-            <a:ext cx="54864" cy="1615440"/>
           </a:xfrm>
           <a:prstGeom prst="roundRect">
             <a:avLst>
@@ -5808,7 +5246,7 @@
       </p:grpSpPr>
       <p:sp>
         <p:nvSpPr>
-          <p:cNvPr id="10" name="Title 9"/>
+          <p:cNvPr id="2" name="Title 1"/>
           <p:cNvSpPr>
             <a:spLocks noGrp="1"/>
           </p:cNvSpPr>
@@ -5816,7 +5254,12 @@
             <p:ph type="title"/>
           </p:nvPr>
         </p:nvSpPr>
-        <p:spPr/>
+        <p:spPr>
+          <a:xfrm>
+            <a:off x="1097280" y="964692"/>
+            <a:ext cx="9997440" cy="1188720"/>
+          </a:xfrm>
+        </p:spPr>
         <p:txBody>
           <a:bodyPr/>
           <a:lstStyle/>
@@ -5826,171 +5269,137 @@
             </a:pPr>
             <a:r>
               <a:rPr/>
-              <a:t>2 Keep Data and Syntax Editors open</a:t>
-            </a:r>
-          </a:p>
-        </p:txBody>
-      </p:sp>
-      <p:sp>
-        <p:nvSpPr>
-          <p:cNvPr id="3" name="Text Placeholder 2"/>
-          <p:cNvSpPr>
-            <a:spLocks noGrp="1"/>
-          </p:cNvSpPr>
-          <p:nvPr>
-            <p:ph idx="1" type="body"/>
-          </p:nvPr>
-        </p:nvSpPr>
-        <p:spPr/>
-        <p:txBody>
-          <a:bodyPr/>
-          <a:lstStyle/>
-          <a:p>
-            <a:pPr lvl="0" indent="0" marL="0">
-              <a:buNone/>
-            </a:pPr>
-            <a:r>
-              <a:rPr b="1"/>
-              <a:t>Data Editor</a:t>
-            </a:r>
-          </a:p>
-        </p:txBody>
-      </p:sp>
-      <p:pic>
-        <p:nvPicPr>
-          <p:cNvPr descr="Focused SPSS Data Editor image showing spreadsheet columns and the Data View and Variable View tabs" id="0" name="Picture 1"/>
-          <p:cNvPicPr>
-            <a:picLocks noGrp="1" noChangeAspect="1"/>
-          </p:cNvPicPr>
-          <p:nvPr/>
-        </p:nvPicPr>
-        <p:blipFill>
-          <a:blip r:embed="rId3"/>
-          <a:stretch>
-            <a:fillRect/>
-          </a:stretch>
-        </p:blipFill>
-        <p:spPr bwMode="auto">
-          <a:xfrm>
-            <a:off x="1574800" y="3416300"/>
-            <a:ext cx="4267200" cy="2032000"/>
-          </a:xfrm>
-          <a:prstGeom prst="rect">
-            <a:avLst/>
-          </a:prstGeom>
-          <a:noFill/>
-          <a:ln w="9525">
-            <a:noFill/>
-            <a:headEnd/>
-            <a:tailEnd/>
-          </a:ln>
-        </p:spPr>
-      </p:pic>
-      <p:sp>
-        <p:nvSpPr>
-          <p:cNvPr id="4" name="Content Placeholder 3"/>
-          <p:cNvSpPr>
-            <a:spLocks noGrp="1"/>
-          </p:cNvSpPr>
-          <p:nvPr>
-            <p:ph idx="2" sz="half"/>
-          </p:nvPr>
-        </p:nvSpPr>
-        <p:spPr/>
-        <p:txBody>
-          <a:bodyPr/>
-          <a:lstStyle/>
-          <a:p>
-            <a:pPr lvl="0" indent="0" marL="0">
-              <a:buNone/>
-            </a:pPr>
-            <a:r>
-              <a:rPr b="1"/>
-              <a:t>Inspect groups and outcomes</a:t>
-            </a:r>
-          </a:p>
-        </p:txBody>
-      </p:sp>
-      <p:sp>
-        <p:nvSpPr>
-          <p:cNvPr id="11" name="Text Placeholder 4"/>
-          <p:cNvSpPr>
-            <a:spLocks noGrp="1"/>
-          </p:cNvSpPr>
-          <p:nvPr>
-            <p:ph idx="13" sz="quarter" type="body"/>
-          </p:nvPr>
-        </p:nvSpPr>
-        <p:spPr/>
-        <p:txBody>
-          <a:bodyPr/>
-          <a:lstStyle/>
-          <a:p>
-            <a:pPr lvl="0" indent="0" marL="0">
-              <a:buNone/>
-            </a:pPr>
-            <a:r>
-              <a:rPr b="1"/>
-              <a:t>Syntax Editor</a:t>
-            </a:r>
-          </a:p>
-        </p:txBody>
-      </p:sp>
-      <p:pic>
-        <p:nvPicPr>
-          <p:cNvPr descr="Focused SPSS Syntax Editor image showing the command area and an annotation pointing to the green Run button" id="0" name="Picture 1"/>
-          <p:cNvPicPr>
-            <a:picLocks noGrp="1" noChangeAspect="1"/>
-          </p:cNvPicPr>
-          <p:nvPr/>
-        </p:nvPicPr>
-        <p:blipFill>
-          <a:blip r:embed="rId4"/>
-          <a:stretch>
-            <a:fillRect/>
-          </a:stretch>
-        </p:blipFill>
-        <p:spPr bwMode="auto">
-          <a:xfrm>
-            <a:off x="6337300" y="3429000"/>
-            <a:ext cx="4241800" cy="2006600"/>
-          </a:xfrm>
-          <a:prstGeom prst="rect">
-            <a:avLst/>
-          </a:prstGeom>
-          <a:noFill/>
-          <a:ln w="9525">
-            <a:noFill/>
-            <a:headEnd/>
-            <a:tailEnd/>
-          </a:ln>
-        </p:spPr>
-      </p:pic>
-      <p:sp>
-        <p:nvSpPr>
+              <a:t>2 Choose between or within</a:t>
+            </a:r>
+          </a:p>
+        </p:txBody>
+      </p:sp>
+      <p:graphicFrame>
+        <p:nvGraphicFramePr>
           <p:cNvPr id="6" name="Content Placeholder 5"/>
-          <p:cNvSpPr>
-            <a:spLocks noGrp="1"/>
-          </p:cNvSpPr>
-          <p:nvPr>
-            <p:ph idx="4" sz="quarter"/>
-          </p:nvPr>
-        </p:nvSpPr>
-        <p:spPr/>
-        <p:txBody>
-          <a:bodyPr/>
-          <a:lstStyle/>
-          <a:p>
-            <a:pPr lvl="0" indent="0" marL="0">
-              <a:buNone/>
-            </a:pPr>
-            <a:r>
-              <a:rPr b="1"/>
-              <a:t>Save and rerun commands</a:t>
-            </a:r>
-          </a:p>
-        </p:txBody>
-      </p:sp>
+          <p:cNvGraphicFramePr>
+            <a:graphicFrameLocks noGrp="1"/>
+          </p:cNvGraphicFramePr>
+          <p:nvPr>
+            <p:ph idx="1"/>
+          </p:nvPr>
+        </p:nvGraphicFramePr>
+        <p:xfrm>
+          <a:off x="1092200" y="2628900"/>
+          <a:ext cx="9994900" cy="3098800"/>
+        </p:xfrm>
+        <a:graphic>
+          <a:graphicData uri="http://schemas.openxmlformats.org/drawingml/2006/table">
+            <a:tbl>
+              <a:tblPr firstRow="1" bandRow="1">
+                <a:tableStyleId>{5C22544A-7EE6-4342-B048-85BDC9FD1C3A}</a:tableStyleId>
+              </a:tblPr>
+              <a:tblGrid>
+                <a:gridCol w="5003800"/>
+                <a:gridCol w="5003800"/>
+              </a:tblGrid>
+              <a:tr h="0">
+                <a:tc>
+                  <a:txBody>
+                    <a:bodyPr/>
+                    <a:lstStyle/>
+                    <a:p>
+                      <a:pPr lvl="0" indent="0" marL="0">
+                        <a:buNone/>
+                      </a:pPr>
+                      <a:r>
+                        <a:rPr/>
+                        <a:t>Design</a:t>
+                      </a:r>
+                    </a:p>
+                  </a:txBody>
+                  <a:tcPr/>
+                </a:tc>
+                <a:tc>
+                  <a:txBody>
+                    <a:bodyPr/>
+                    <a:lstStyle/>
+                    <a:p>
+                      <a:pPr lvl="0" indent="0" marL="0">
+                        <a:buNone/>
+                      </a:pPr>
+                      <a:r>
+                        <a:rPr/>
+                        <a:t>What is compared?</a:t>
+                      </a:r>
+                    </a:p>
+                  </a:txBody>
+                  <a:tcPr/>
+                </a:tc>
+              </a:tr>
+              <a:tr h="0">
+                <a:tc>
+                  <a:txBody>
+                    <a:bodyPr/>
+                    <a:lstStyle/>
+                    <a:p>
+                      <a:pPr lvl="0" indent="0" marL="0">
+                        <a:buNone/>
+                      </a:pPr>
+                      <a:r>
+                        <a:rPr b="1"/>
+                        <a:t>Between-groups</a:t>
+                      </a:r>
+                    </a:p>
+                  </a:txBody>
+                </a:tc>
+                <a:tc>
+                  <a:txBody>
+                    <a:bodyPr/>
+                    <a:lstStyle/>
+                    <a:p>
+                      <a:pPr lvl="0" indent="0" marL="0">
+                        <a:buNone/>
+                      </a:pPr>
+                      <a:r>
+                        <a:rPr/>
+                        <a:t>Scores from different participants in two groups</a:t>
+                      </a:r>
+                    </a:p>
+                  </a:txBody>
+                </a:tc>
+              </a:tr>
+              <a:tr h="0">
+                <a:tc>
+                  <a:txBody>
+                    <a:bodyPr/>
+                    <a:lstStyle/>
+                    <a:p>
+                      <a:pPr lvl="0" indent="0" marL="0">
+                        <a:buNone/>
+                      </a:pPr>
+                      <a:r>
+                        <a:rPr b="1"/>
+                        <a:t>Within-groups</a:t>
+                      </a:r>
+                    </a:p>
+                  </a:txBody>
+                </a:tc>
+                <a:tc>
+                  <a:txBody>
+                    <a:bodyPr/>
+                    <a:lstStyle/>
+                    <a:p>
+                      <a:pPr lvl="0" indent="0" marL="0">
+                        <a:buNone/>
+                      </a:pPr>
+                      <a:r>
+                        <a:rPr/>
+                        <a:t>Two scores from each participant</a:t>
+                      </a:r>
+                    </a:p>
+                  </a:txBody>
+                </a:tc>
+              </a:tr>
+            </a:tbl>
+          </a:graphicData>
+        </a:graphic>
+      </p:graphicFrame>
     </p:spTree>
   </p:cSld>
 </p:sld>
@@ -6038,41 +5447,36 @@
             </a:pPr>
             <a:r>
               <a:rPr/>
-              <a:t>3 Read results in Output Viewer</a:t>
-            </a:r>
-          </a:p>
-        </p:txBody>
-      </p:sp>
-      <p:pic>
-        <p:nvPicPr>
-          <p:cNvPr descr="SPSS-style one-way ANOVA output for emotional impact by two-level height-gap group, showing F equals 3.578 with 1 and 44 degrees of freedom and p equals .065" id="0" name="Picture 1"/>
-          <p:cNvPicPr>
-            <a:picLocks noGrp="1" noChangeAspect="1"/>
-          </p:cNvPicPr>
-          <p:nvPr/>
-        </p:nvPicPr>
-        <p:blipFill>
-          <a:blip r:embed="rId3"/>
-          <a:stretch>
-            <a:fillRect/>
-          </a:stretch>
-        </p:blipFill>
-        <p:spPr bwMode="auto">
-          <a:xfrm>
-            <a:off x="1092200" y="2641600"/>
-            <a:ext cx="9994900" cy="3086100"/>
-          </a:xfrm>
-          <a:prstGeom prst="rect">
-            <a:avLst/>
-          </a:prstGeom>
-          <a:noFill/>
-          <a:ln w="9525">
-            <a:noFill/>
-            <a:headEnd/>
-            <a:tailEnd/>
-          </a:ln>
-        </p:spPr>
-      </p:pic>
+              <a:t>2 Choose between or within (continued)</a:t>
+            </a:r>
+          </a:p>
+        </p:txBody>
+      </p:sp>
+      <p:sp>
+        <p:nvSpPr>
+          <p:cNvPr id="3" name="Content Placeholder 2"/>
+          <p:cNvSpPr>
+            <a:spLocks noGrp="1"/>
+          </p:cNvSpPr>
+          <p:nvPr>
+            <p:ph idx="1"/>
+          </p:nvPr>
+        </p:nvSpPr>
+        <p:spPr/>
+        <p:txBody>
+          <a:bodyPr/>
+          <a:lstStyle/>
+          <a:p>
+            <a:pPr lvl="0" indent="0" marL="0">
+              <a:buNone/>
+            </a:pPr>
+            <a:r>
+              <a:rPr b="1"/>
+              <a:t>Identify who supplies each score</a:t>
+            </a:r>
+          </a:p>
+        </p:txBody>
+      </p:sp>
     </p:spTree>
   </p:cSld>
 </p:sld>
@@ -6120,137 +5524,74 @@
             </a:pPr>
             <a:r>
               <a:rPr/>
-              <a:t>4 Choose between or within</a:t>
-            </a:r>
-          </a:p>
-        </p:txBody>
-      </p:sp>
-      <p:graphicFrame>
-        <p:nvGraphicFramePr>
-          <p:cNvPr id="6" name="Content Placeholder 5"/>
-          <p:cNvGraphicFramePr>
-            <a:graphicFrameLocks noGrp="1"/>
-          </p:cNvGraphicFramePr>
+              <a:t>3 Predict and prepare RH1</a:t>
+            </a:r>
+          </a:p>
+        </p:txBody>
+      </p:sp>
+      <p:sp>
+        <p:nvSpPr>
+          <p:cNvPr id="3" name="Content Placeholder 2"/>
+          <p:cNvSpPr>
+            <a:spLocks noGrp="1"/>
+          </p:cNvSpPr>
           <p:nvPr>
             <p:ph idx="1"/>
           </p:nvPr>
-        </p:nvGraphicFramePr>
-        <p:xfrm>
-          <a:off x="1092200" y="2628900"/>
-          <a:ext cx="9994900" cy="3098800"/>
-        </p:xfrm>
-        <a:graphic>
-          <a:graphicData uri="http://schemas.openxmlformats.org/drawingml/2006/table">
-            <a:tbl>
-              <a:tblPr firstRow="1" bandRow="1">
-                <a:tableStyleId>{5C22544A-7EE6-4342-B048-85BDC9FD1C3A}</a:tableStyleId>
-              </a:tblPr>
-              <a:tblGrid>
-                <a:gridCol w="4991100"/>
-                <a:gridCol w="4991100"/>
-              </a:tblGrid>
-              <a:tr h="0">
-                <a:tc>
-                  <a:txBody>
-                    <a:bodyPr/>
-                    <a:lstStyle/>
-                    <a:p>
-                      <a:pPr lvl="0" indent="0" marL="0">
-                        <a:buNone/>
-                      </a:pPr>
-                      <a:r>
-                        <a:rPr/>
-                        <a:t>Design question</a:t>
-                      </a:r>
-                    </a:p>
-                  </a:txBody>
-                  <a:tcPr/>
-                </a:tc>
-                <a:tc>
-                  <a:txBody>
-                    <a:bodyPr/>
-                    <a:lstStyle/>
-                    <a:p>
-                      <a:pPr lvl="0" indent="0" marL="0">
-                        <a:buNone/>
-                      </a:pPr>
-                      <a:r>
-                        <a:rPr/>
-                        <a:t>Analysis</a:t>
-                      </a:r>
-                    </a:p>
-                  </a:txBody>
-                  <a:tcPr/>
-                </a:tc>
-              </a:tr>
-              <a:tr h="0">
-                <a:tc>
-                  <a:txBody>
-                    <a:bodyPr/>
-                    <a:lstStyle/>
-                    <a:p>
-                      <a:pPr lvl="0" indent="0" marL="0">
-                        <a:buNone/>
-                      </a:pPr>
-                      <a:r>
-                        <a:rPr/>
-                        <a:t>Different cases in each condition?</a:t>
-                      </a:r>
-                    </a:p>
-                  </a:txBody>
-                </a:tc>
-                <a:tc>
-                  <a:txBody>
-                    <a:bodyPr/>
-                    <a:lstStyle/>
-                    <a:p>
-                      <a:pPr lvl="0" indent="0" marL="0">
-                        <a:buNone/>
-                      </a:pPr>
-                      <a:r>
-                        <a:rPr/>
-                        <a:t>Between-groups ANOVA</a:t>
-                      </a:r>
-                    </a:p>
-                  </a:txBody>
-                </a:tc>
-              </a:tr>
-              <a:tr h="0">
-                <a:tc>
-                  <a:txBody>
-                    <a:bodyPr/>
-                    <a:lstStyle/>
-                    <a:p>
-                      <a:pPr lvl="0" indent="0" marL="0">
-                        <a:buNone/>
-                      </a:pPr>
-                      <a:r>
-                        <a:rPr/>
-                        <a:t>Same cases in every condition?</a:t>
-                      </a:r>
-                    </a:p>
-                  </a:txBody>
-                </a:tc>
-                <a:tc>
-                  <a:txBody>
-                    <a:bodyPr/>
-                    <a:lstStyle/>
-                    <a:p>
-                      <a:pPr lvl="0" indent="0" marL="0">
-                        <a:buNone/>
-                      </a:pPr>
-                      <a:r>
-                        <a:rPr/>
-                        <a:t>Within-groups ANOVA</a:t>
-                      </a:r>
-                    </a:p>
-                  </a:txBody>
-                </a:tc>
-              </a:tr>
-            </a:tbl>
-          </a:graphicData>
-        </a:graphic>
-      </p:graphicFrame>
+        </p:nvSpPr>
+        <p:spPr/>
+        <p:txBody>
+          <a:bodyPr/>
+          <a:lstStyle/>
+          <a:p>
+            <a:pPr lvl="0" indent="0" marL="0">
+              <a:buNone/>
+            </a:pPr>
+            <a:r>
+              <a:rPr/>
+              <a:t>[RH1 · Steps 1–2]</a:t>
+            </a:r>
+          </a:p>
+          <a:p>
+            <a:pPr lvl="0" indent="0" marL="0">
+              <a:buNone/>
+            </a:pPr>
+            <a:r>
+              <a:rPr b="1"/>
+              <a:t>Emotional impact by height-gap group</a:t>
+            </a:r>
+          </a:p>
+          <a:p>
+            <a:pPr lvl="0"/>
+            <a:r>
+              <a:rPr/>
+              <a:t>Which group does RH1 predict will score higher?</a:t>
+            </a:r>
+          </a:p>
+          <a:p>
+            <a:pPr lvl="0"/>
+            <a:r>
+              <a:rPr/>
+              <a:t>Identify the group codes and score variable</a:t>
+            </a:r>
+          </a:p>
+          <a:p>
+            <a:pPr lvl="0"/>
+            <a:r>
+              <a:rPr/>
+              <a:t>Check variable labels and </a:t>
+            </a:r>
+            <a:r>
+              <a:rPr b="1"/>
+              <a:t>−99</a:t>
+            </a:r>
+            <a:r>
+              <a:rPr/>
+              <a:t> missing-value declarations</a:t>
+            </a:r>
+          </a:p>
+        </p:txBody>
+      </p:sp>
     </p:spTree>
   </p:cSld>
 </p:sld>
@@ -6298,7 +5639,7 @@
             </a:pPr>
             <a:r>
               <a:rPr/>
-              <a:t>5 Read means before the F test</a:t>
+              <a:t>4 Recode the height-gap groups</a:t>
             </a:r>
           </a:p>
         </p:txBody>
@@ -6318,71 +5659,23 @@
           <a:bodyPr/>
           <a:lstStyle/>
           <a:p>
-            <a:pPr lvl="0" indent="-457200" marL="457200">
-              <a:buAutoNum type="arabicPeriod"/>
+            <a:pPr lvl="0" indent="0">
+              <a:buNone/>
             </a:pPr>
             <a:r>
-              <a:rPr/>
-              <a:t>State the predicted ordering of means.</a:t>
-            </a:r>
-          </a:p>
-          <a:p>
-            <a:pPr lvl="0" indent="-457200" marL="457200">
-              <a:buAutoNum type="arabicPeriod"/>
-            </a:pPr>
-            <a:r>
-              <a:rPr/>
-              <a:t>Compare the observed means.</a:t>
-            </a:r>
-          </a:p>
-          <a:p>
-            <a:pPr lvl="0" indent="-457200" marL="457200">
-              <a:buAutoNum type="arabicPeriod"/>
-            </a:pPr>
-            <a:r>
-              <a:rPr/>
-              <a:t>Read </a:t>
-            </a:r>
-            <a:r>
-              <a:rPr i="1"/>
-              <a:t>F</a:t>
-            </a:r>
-            <a:r>
-              <a:rPr/>
-              <a:t>, both </a:t>
-            </a:r>
-            <a:r>
-              <a:rPr i="1"/>
-              <a:t>df</a:t>
-            </a:r>
-            <a:r>
-              <a:rPr/>
-              <a:t>, </a:t>
-            </a:r>
-            <a:r>
-              <a:rPr i="1"/>
-              <a:t>p</a:t>
-            </a:r>
-            <a:r>
-              <a:rPr/>
-              <a:t>, and </a:t>
-            </a:r>
-            <a:r>
-              <a:rPr i="1"/>
-              <a:t>MSe</a:t>
-            </a:r>
-            <a:r>
-              <a:rPr/>
-              <a:t>.</a:t>
-            </a:r>
-          </a:p>
-          <a:p>
-            <a:pPr lvl="0" indent="-457200" marL="457200">
-              <a:buAutoNum type="arabicPeriod"/>
-            </a:pPr>
-            <a:r>
-              <a:rPr/>
-              <a:t>Add effect size and decide.</a:t>
+              <a:rPr>
+                <a:latin typeface="Courier"/>
+              </a:rPr>
+              <a:t>FILTER OFF.
+USE ALL.
+RECODE height_gap
+  (1, 2 = 1) (3 = 2)
+  INTO height_gap_2cat.
+VARIABLE LABELS height_gap_2cat
+  'Height gap (2 categories)'.
+VALUE LABELS height_gap_2cat
+  1 'Small (Minimal/Average)' 2 'Big'.
+EXECUTE.</a:t>
             </a:r>
           </a:p>
         </p:txBody>
@@ -6434,7 +5727,7 @@
             </a:pPr>
             <a:r>
               <a:rPr/>
-              <a:t>6 Prepare the RH1 groups</a:t>
+              <a:t>5 Run the RH1 ANOVA</a:t>
             </a:r>
           </a:p>
         </p:txBody>
@@ -6461,14 +5754,10 @@
               <a:rPr>
                 <a:latin typeface="Courier"/>
               </a:rPr>
-              <a:t>RECODE height_gap
-  (1, 2 = 1) (3 = 2)
-  INTO height_gap_2cat.
-VARIABLE LABELS height_gap_2cat
-  'Height gap: small versus big'.
-VALUE LABELS height_gap_2cat
-  1 'Minimal or average' 2 'Big'.
-EXECUTE.</a:t>
+              <a:t>ONEWAY emotional_impact
+  BY height_gap_2cat
+  /STATISTICS DESCRIPTIVES
+  /MISSING ANALYSIS.</a:t>
             </a:r>
           </a:p>
         </p:txBody>
@@ -6520,37 +5809,97 @@
             </a:pPr>
             <a:r>
               <a:rPr/>
-              <a:t>7 Run the RH1 ANOVA</a:t>
-            </a:r>
-          </a:p>
-        </p:txBody>
-      </p:sp>
-      <p:sp>
-        <p:nvSpPr>
-          <p:cNvPr id="3" name="Content Placeholder 2"/>
-          <p:cNvSpPr>
-            <a:spLocks noGrp="1"/>
-          </p:cNvSpPr>
+              <a:t>6 Read the RH1 output</a:t>
+            </a:r>
+          </a:p>
+        </p:txBody>
+      </p:sp>
+      <p:pic>
+        <p:nvPicPr>
+          <p:cNvPr descr="RH1 ANOVA for emotional impact. Between Groups: sum of squares 38.084, df 1, mean square 38.084, F 3.578, Sig. .065. Within Groups: sum of squares 468.351, df 44, mean square 10.644. Total: sum of squares 506.435, df 45." id="0" name="Picture 1"/>
+          <p:cNvPicPr>
+            <a:picLocks noGrp="1" noChangeAspect="1"/>
+          </p:cNvPicPr>
+          <p:nvPr/>
+        </p:nvPicPr>
+        <p:blipFill>
+          <a:blip r:embed="rId2"/>
+          <a:stretch>
+            <a:fillRect/>
+          </a:stretch>
+        </p:blipFill>
+        <p:spPr bwMode="auto">
+          <a:xfrm>
+            <a:off x="1892300" y="2628900"/>
+            <a:ext cx="8407400" cy="2590800"/>
+          </a:xfrm>
+          <a:prstGeom prst="rect">
+            <a:avLst/>
+          </a:prstGeom>
+          <a:noFill/>
+          <a:ln w="9525">
+            <a:noFill/>
+            <a:headEnd/>
+            <a:tailEnd/>
+          </a:ln>
+        </p:spPr>
+      </p:pic>
+      <p:sp>
+        <p:nvSpPr>
+          <p:cNvPr id="1" name="TextBox 3"/>
+          <p:cNvSpPr txBox="1"/>
           <p:nvPr>
             <p:ph idx="1"/>
           </p:nvPr>
         </p:nvSpPr>
-        <p:spPr/>
-        <p:txBody>
-          <a:bodyPr/>
-          <a:lstStyle/>
-          <a:p>
-            <a:pPr lvl="0" indent="0">
+        <p:spPr>
+          <a:xfrm>
+            <a:off x="1092200" y="5219700"/>
+            <a:ext cx="9994900" cy="508000"/>
+          </a:xfrm>
+          <a:prstGeom prst="rect">
+            <a:avLst/>
+          </a:prstGeom>
+          <a:noFill/>
+        </p:spPr>
+        <p:txBody>
+          <a:bodyPr/>
+          <a:lstStyle/>
+          <a:p>
+            <a:pPr lvl="0" indent="0" marL="0" algn="ctr">
               <a:buNone/>
             </a:pPr>
             <a:r>
-              <a:rPr>
-                <a:latin typeface="Courier"/>
-              </a:rPr>
-              <a:t>ONEWAY emotional_impact
-  BY height_gap_2cat
-  /STATISTICS DESCRIPTIVES
-  /MISSING LISTWISE.</a:t>
+              <a:rPr b="1"/>
+              <a:t>Identify </a:t>
+            </a:r>
+            <a:r>
+              <a:rPr b="1" i="1"/>
+              <a:t>F</a:t>
+            </a:r>
+            <a:r>
+              <a:rPr b="1"/>
+              <a:t>, both </a:t>
+            </a:r>
+            <a:r>
+              <a:rPr b="1" i="1"/>
+              <a:t>df</a:t>
+            </a:r>
+            <a:r>
+              <a:rPr b="1"/>
+              <a:t>, </a:t>
+            </a:r>
+            <a:r>
+              <a:rPr b="1" i="1"/>
+              <a:t>MSe</a:t>
+            </a:r>
+            <a:r>
+              <a:rPr b="1"/>
+              <a:t>, and </a:t>
+            </a:r>
+            <a:r>
+              <a:rPr b="1" i="1"/>
+              <a:t>p</a:t>
             </a:r>
           </a:p>
         </p:txBody>
@@ -6602,41 +5951,36 @@
             </a:pPr>
             <a:r>
               <a:rPr/>
-              <a:t>8 Read F, both df, MSe, and p</a:t>
-            </a:r>
-          </a:p>
-        </p:txBody>
-      </p:sp>
-      <p:pic>
-        <p:nvPicPr>
-          <p:cNvPr descr="SPSS-style one-way ANOVA output for emotional impact by two-level height-gap group, showing F equals 3.578 with 1 and 44 degrees of freedom and p equals .065" id="0" name="Picture 1"/>
-          <p:cNvPicPr>
-            <a:picLocks noGrp="1" noChangeAspect="1"/>
-          </p:cNvPicPr>
-          <p:nvPr/>
-        </p:nvPicPr>
-        <p:blipFill>
-          <a:blip r:embed="rId3"/>
-          <a:stretch>
-            <a:fillRect/>
-          </a:stretch>
-        </p:blipFill>
-        <p:spPr bwMode="auto">
-          <a:xfrm>
-            <a:off x="1092200" y="2641600"/>
-            <a:ext cx="9994900" cy="3086100"/>
-          </a:xfrm>
-          <a:prstGeom prst="rect">
-            <a:avLst/>
-          </a:prstGeom>
-          <a:noFill/>
-          <a:ln w="9525">
-            <a:noFill/>
-            <a:headEnd/>
-            <a:tailEnd/>
-          </a:ln>
-        </p:spPr>
-      </p:pic>
+              <a:t>6 Read the RH1 output (continued)</a:t>
+            </a:r>
+          </a:p>
+        </p:txBody>
+      </p:sp>
+      <p:sp>
+        <p:nvSpPr>
+          <p:cNvPr id="3" name="Content Placeholder 2"/>
+          <p:cNvSpPr>
+            <a:spLocks noGrp="1"/>
+          </p:cNvSpPr>
+          <p:nvPr>
+            <p:ph idx="1"/>
+          </p:nvPr>
+        </p:nvSpPr>
+        <p:spPr/>
+        <p:txBody>
+          <a:bodyPr/>
+          <a:lstStyle/>
+          <a:p>
+            <a:pPr lvl="0" indent="0" marL="0">
+              <a:buNone/>
+            </a:pPr>
+            <a:r>
+              <a:rPr/>
+              <a:t>Does the observed difference support RH1?</a:t>
+            </a:r>
+          </a:p>
+        </p:txBody>
+      </p:sp>
     </p:spTree>
   </p:cSld>
 </p:sld>
